--- a/ndb-pain-regional-variation-japan/output/je/JE_figures_EN.pptx
+++ b/ndb-pain-regional-variation-japan/output/je/JE_figures_EN.pptx
@@ -3175,7 +3175,7 @@
               </a:defRPr>
             </a:pPr>
             <a:r>
-              <a:t>Figure 1. Outpatient neuropathic pain drug prescribing per surgery by prefecture. Bars represent individual prefectures ordered by prescribing index. Tohoku prefectures are indicated in red. Dashed line indicates the national mean.</a:t>
+              <a:t>Figure 1. Outpatient neuropathic pain drug prescribing per surgery by prefecture. Bars represent individual prefectures ordered by prescribing index. Bars are coloured by regional block. Dashed line indicates the national mean.</a:t>
             </a:r>
           </a:p>
         </p:txBody>

--- a/ndb-pain-regional-variation-japan/output/je/JE_figures_EN.pptx
+++ b/ndb-pain-regional-variation-japan/output/je/JE_figures_EN.pptx
@@ -8,6 +8,7 @@
     <p:sldId id="256" r:id="rId7"/>
     <p:sldId id="257" r:id="rId8"/>
     <p:sldId id="258" r:id="rId9"/>
+    <p:sldId id="259" r:id="rId10"/>
   </p:sldIdLst>
   <p:sldSz cx="12191695" cy="6858000" type="screen4x3"/>
   <p:notesSz cx="6858000" cy="9144000"/>
@@ -3392,6 +3393,114 @@
             </a:pPr>
             <a:r>
               <a:t>Figure 3. Regional comparison of neuropathic pain prescribing: (a) unadjusted and (b) after adjustment for confounding disease proxies. Error bars indicate SD.</a:t>
+            </a:r>
+          </a:p>
+        </p:txBody>
+      </p:sp>
+    </p:spTree>
+  </p:cSld>
+  <p:clrMapOvr>
+    <a:masterClrMapping/>
+  </p:clrMapOvr>
+</p:sld>
+</file>
+
+<file path=ppt/slides/slide4.xml><?xml version="1.0" encoding="utf-8"?>
+<p:sld xmlns:a="http://schemas.openxmlformats.org/drawingml/2006/main" xmlns:p="http://schemas.openxmlformats.org/presentationml/2006/main" xmlns:r="http://schemas.openxmlformats.org/officeDocument/2006/relationships">
+  <p:cSld>
+    <p:spTree>
+      <p:nvGrpSpPr>
+        <p:cNvPr id="1" name=""/>
+        <p:cNvGrpSpPr/>
+        <p:nvPr/>
+      </p:nvGrpSpPr>
+      <p:grpSpPr/>
+      <p:sp>
+        <p:nvSpPr>
+          <p:cNvPr id="2" name="TextBox 1"/>
+          <p:cNvSpPr txBox="1"/>
+          <p:nvPr/>
+        </p:nvSpPr>
+        <p:spPr>
+          <a:xfrm>
+            <a:off x="457200" y="182880"/>
+            <a:ext cx="10972800" cy="457200"/>
+          </a:xfrm>
+          <a:prstGeom prst="rect">
+            <a:avLst/>
+          </a:prstGeom>
+          <a:noFill/>
+        </p:spPr>
+        <p:txBody>
+          <a:bodyPr wrap="none">
+            <a:spAutoFit/>
+          </a:bodyPr>
+          <a:lstStyle/>
+          <a:p>
+            <a:pPr>
+              <a:defRPr sz="2400" b="1">
+                <a:latin typeface="Arial"/>
+              </a:defRPr>
+            </a:pPr>
+            <a:r>
+              <a:t>Figure 4</a:t>
+            </a:r>
+          </a:p>
+        </p:txBody>
+      </p:sp>
+      <p:pic>
+        <p:nvPicPr>
+          <p:cNvPr id="3" name="Picture 2" descr="fig_cslc_demand_supply_en.png"/>
+          <p:cNvPicPr>
+            <a:picLocks noChangeAspect="1"/>
+          </p:cNvPicPr>
+          <p:nvPr/>
+        </p:nvPicPr>
+        <p:blipFill>
+          <a:blip r:embed="rId2"/>
+          <a:stretch>
+            <a:fillRect/>
+          </a:stretch>
+        </p:blipFill>
+        <p:spPr>
+          <a:xfrm>
+            <a:off x="2486199" y="731520"/>
+            <a:ext cx="7219296" cy="5029200"/>
+          </a:xfrm>
+          <a:prstGeom prst="rect">
+            <a:avLst/>
+          </a:prstGeom>
+        </p:spPr>
+      </p:pic>
+      <p:sp>
+        <p:nvSpPr>
+          <p:cNvPr id="4" name="TextBox 3"/>
+          <p:cNvSpPr txBox="1"/>
+          <p:nvPr/>
+        </p:nvSpPr>
+        <p:spPr>
+          <a:xfrm>
+            <a:off x="457200" y="5852160"/>
+            <a:ext cx="10972800" cy="914400"/>
+          </a:xfrm>
+          <a:prstGeom prst="rect">
+            <a:avLst/>
+          </a:prstGeom>
+          <a:noFill/>
+        </p:spPr>
+        <p:txBody>
+          <a:bodyPr wrap="square">
+            <a:spAutoFit/>
+          </a:bodyPr>
+          <a:lstStyle/>
+          <a:p>
+            <a:pPr>
+              <a:defRPr sz="1200">
+                <a:latin typeface="Arial"/>
+              </a:defRPr>
+            </a:pPr>
+            <a:r>
+              <a:t>Figure 4. Demand–supply dissociation: CSLC symptom prevalence rate (per 1,000 population) vs acute analgesic prescribing per surgery across 47 prefectures. Each dot represents one prefecture, coloured by regional block. The near-zero correlation (r=0.03, P=0.85) indicates that prescribing variation is dissociated from symptom burden.</a:t>
             </a:r>
           </a:p>
         </p:txBody>

--- a/ndb-pain-regional-variation-japan/output/je/JE_figures_EN.pptx
+++ b/ndb-pain-regional-variation-japan/output/je/JE_figures_EN.pptx
@@ -3141,7 +3141,7 @@
         <p:spPr>
           <a:xfrm>
             <a:off x="1066647" y="731520"/>
-            <a:ext cx="10058400" cy="4360748"/>
+            <a:ext cx="10058400" cy="4355792"/>
           </a:xfrm>
           <a:prstGeom prst="rect">
             <a:avLst/>
@@ -3156,7 +3156,7 @@
         </p:nvSpPr>
         <p:spPr>
           <a:xfrm>
-            <a:off x="457200" y="5183708"/>
+            <a:off x="457200" y="5178752"/>
             <a:ext cx="10972800" cy="914400"/>
           </a:xfrm>
           <a:prstGeom prst="rect">
@@ -3176,7 +3176,7 @@
               </a:defRPr>
             </a:pPr>
             <a:r>
-              <a:t>Figure 1. Outpatient neuropathic pain drug prescribing per surgery by prefecture. Bars represent individual prefectures ordered by prescribing index. Bars are coloured by regional block. Dashed line indicates the national mean.</a:t>
+              <a:t>Figure 1. Outpatient neuropathic pain drug prescribing per surgery by prefecture. Bars represent individual prefectures ordered by prescribing index. Bars indicate regional blocks (distinguished by shading and hatch pattern). Dashed line indicates the national mean.</a:t>
             </a:r>
           </a:p>
         </p:txBody>
@@ -3248,8 +3248,8 @@
         </p:blipFill>
         <p:spPr>
           <a:xfrm>
-            <a:off x="3300358" y="731520"/>
-            <a:ext cx="5590979" cy="5029200"/>
+            <a:off x="3240714" y="731520"/>
+            <a:ext cx="5710266" cy="5029200"/>
           </a:xfrm>
           <a:prstGeom prst="rect">
             <a:avLst/>
@@ -3284,7 +3284,7 @@
               </a:defRPr>
             </a:pPr>
             <a:r>
-              <a:t>Figure 2. Correlation between neuropathic pain prescribing and confounder disease proxies across 47 prefectures. Each dot represents one prefecture. Diabetes drugs show the strongest correlation (r=0.87).</a:t>
+              <a:t>Figure 2. Correlation between neuropathic pain prescribing and confounder disease proxies across 47 prefectures. Each marker shape represents a regional block. Diabetes drugs show the strongest correlation (r=0.87).</a:t>
             </a:r>
           </a:p>
         </p:txBody>
@@ -3357,7 +3357,7 @@
         <p:spPr>
           <a:xfrm>
             <a:off x="1066647" y="731520"/>
-            <a:ext cx="10058400" cy="4364966"/>
+            <a:ext cx="10058400" cy="4328677"/>
           </a:xfrm>
           <a:prstGeom prst="rect">
             <a:avLst/>
@@ -3372,7 +3372,7 @@
         </p:nvSpPr>
         <p:spPr>
           <a:xfrm>
-            <a:off x="457200" y="5187926"/>
+            <a:off x="457200" y="5151637"/>
             <a:ext cx="10972800" cy="914400"/>
           </a:xfrm>
           <a:prstGeom prst="rect">
@@ -3500,7 +3500,7 @@
               </a:defRPr>
             </a:pPr>
             <a:r>
-              <a:t>Figure 4. Demand–supply dissociation: CSLC symptom prevalence rate (per 1,000 population) vs acute analgesic prescribing per surgery across 47 prefectures. Each dot represents one prefecture, coloured by regional block. The near-zero correlation (r=0.03, P=0.85) indicates that prescribing variation is dissociated from symptom burden.</a:t>
+              <a:t>Figure 4. Demand–supply dissociation: CSLC symptom prevalence rate (per 1,000 population) vs acute analgesic prescribing per surgery across 47 prefectures. Each marker shape represents a regional block. The near-zero correlation (r=0.03, P=0.85) indicates that prescribing variation is dissociated from symptom burden.</a:t>
             </a:r>
           </a:p>
         </p:txBody>

--- a/ndb-pain-regional-variation-japan/output/je/JE_figures_EN.pptx
+++ b/ndb-pain-regional-variation-japan/output/je/JE_figures_EN.pptx
@@ -3176,7 +3176,7 @@
               </a:defRPr>
             </a:pPr>
             <a:r>
-              <a:t>Figure 1. Outpatient neuropathic pain drug prescribing per surgery by prefecture. Bars represent individual prefectures ordered by prescribing index. Bars indicate regional blocks (distinguished by shading and hatch pattern). Dashed line indicates the national mean.</a:t>
+              <a:t>Figure 1. Outpatient neuropathic pain drug prescribing per surgery by prefecture. Bars represent individual prefectures ordered by prescribing index. Bars indicate regional blocks (distinguished by colour and hatch pattern). Dashed line indicates the national mean.</a:t>
             </a:r>
           </a:p>
         </p:txBody>
@@ -3284,7 +3284,7 @@
               </a:defRPr>
             </a:pPr>
             <a:r>
-              <a:t>Figure 2. Correlation between neuropathic pain prescribing and confounder disease proxies across 47 prefectures. Each marker shape represents a regional block. Diabetes drugs show the strongest correlation (r=0.87).</a:t>
+              <a:t>Figure 2. Correlation between neuropathic pain prescribing and confounder disease proxies across 47 prefectures. Each marker represents a regional block (distinguished by colour and shape). Diabetes drugs show the strongest correlation (r=0.87).</a:t>
             </a:r>
           </a:p>
         </p:txBody>
@@ -3500,7 +3500,7 @@
               </a:defRPr>
             </a:pPr>
             <a:r>
-              <a:t>Figure 4. Demand–supply dissociation: CSLC symptom prevalence rate (per 1,000 population) vs acute analgesic prescribing per surgery across 47 prefectures. Each marker shape represents a regional block. The near-zero correlation (r=0.03, P=0.85) indicates that prescribing variation is dissociated from symptom burden.</a:t>
+              <a:t>Figure 4. Demand–supply dissociation: CSLC symptom prevalence rate (per 1,000 population) vs acute analgesic prescribing per surgery across 47 prefectures. Each marker represents a regional block (distinguished by colour and shape). The near-zero correlation (r=0.03, P=0.85) indicates that prescribing variation is dissociated from symptom burden.</a:t>
             </a:r>
           </a:p>
         </p:txBody>
